--- a/CV_Template_reutilisable.pptx
+++ b/CV_Template_reutilisable.pptx
@@ -197,7 +197,7 @@
           <a:p>
             <a:fld id="{80380171-B170-D74B-8D0E-6878E4EF4331}" type="datetimeFigureOut">
               <a:rPr lang="en-GB" smtClean="0"/>
-              <a:t>07/07/2026</a:t>
+              <a:t>21/08/2026</a:t>
             </a:fld>
             <a:endParaRPr lang="en-GB"/>
           </a:p>
@@ -513,7 +513,9 @@
               <a:t>TEMPLATE CV — à personnaliser</a:t>
             </a:r>
           </a:p>
-          <a:p/>
+          <a:p>
+            <a:endParaRPr/>
+          </a:p>
           <a:p>
             <a:r>
               <a:t>Remplacer les champs entre crochets sans modifier la mise en page.</a:t>
@@ -721,7 +723,7 @@
           <a:p>
             <a:fld id="{3E02A807-A954-F94A-B44E-2817F9E31610}" type="datetimeFigureOut">
               <a:rPr lang="en-GB" smtClean="0"/>
-              <a:t>07/07/2026</a:t>
+              <a:t>21/08/2026</a:t>
             </a:fld>
             <a:endParaRPr lang="en-GB"/>
           </a:p>
@@ -921,7 +923,7 @@
           <a:p>
             <a:fld id="{3E02A807-A954-F94A-B44E-2817F9E31610}" type="datetimeFigureOut">
               <a:rPr lang="en-GB" smtClean="0"/>
-              <a:t>07/07/2026</a:t>
+              <a:t>21/08/2026</a:t>
             </a:fld>
             <a:endParaRPr lang="en-GB"/>
           </a:p>
@@ -1131,7 +1133,7 @@
           <a:p>
             <a:fld id="{3E02A807-A954-F94A-B44E-2817F9E31610}" type="datetimeFigureOut">
               <a:rPr lang="en-GB" smtClean="0"/>
-              <a:t>07/07/2026</a:t>
+              <a:t>21/08/2026</a:t>
             </a:fld>
             <a:endParaRPr lang="en-GB"/>
           </a:p>
@@ -1366,7 +1368,7 @@
           <a:p>
             <a:fld id="{3E02A807-A954-F94A-B44E-2817F9E31610}" type="datetimeFigureOut">
               <a:rPr lang="en-GB" smtClean="0"/>
-              <a:t>07/07/2026</a:t>
+              <a:t>21/08/2026</a:t>
             </a:fld>
             <a:endParaRPr lang="en-GB"/>
           </a:p>
@@ -1642,7 +1644,7 @@
           <a:p>
             <a:fld id="{3E02A807-A954-F94A-B44E-2817F9E31610}" type="datetimeFigureOut">
               <a:rPr lang="en-GB" smtClean="0"/>
-              <a:t>07/07/2026</a:t>
+              <a:t>21/08/2026</a:t>
             </a:fld>
             <a:endParaRPr lang="en-GB"/>
           </a:p>
@@ -1910,7 +1912,7 @@
           <a:p>
             <a:fld id="{3E02A807-A954-F94A-B44E-2817F9E31610}" type="datetimeFigureOut">
               <a:rPr lang="en-GB" smtClean="0"/>
-              <a:t>07/07/2026</a:t>
+              <a:t>21/08/2026</a:t>
             </a:fld>
             <a:endParaRPr lang="en-GB"/>
           </a:p>
@@ -2325,7 +2327,7 @@
           <a:p>
             <a:fld id="{3E02A807-A954-F94A-B44E-2817F9E31610}" type="datetimeFigureOut">
               <a:rPr lang="en-GB" smtClean="0"/>
-              <a:t>07/07/2026</a:t>
+              <a:t>21/08/2026</a:t>
             </a:fld>
             <a:endParaRPr lang="en-GB"/>
           </a:p>
@@ -2467,7 +2469,7 @@
           <a:p>
             <a:fld id="{3E02A807-A954-F94A-B44E-2817F9E31610}" type="datetimeFigureOut">
               <a:rPr lang="en-GB" smtClean="0"/>
-              <a:t>07/07/2026</a:t>
+              <a:t>21/08/2026</a:t>
             </a:fld>
             <a:endParaRPr lang="en-GB"/>
           </a:p>
@@ -2580,7 +2582,7 @@
           <a:p>
             <a:fld id="{3E02A807-A954-F94A-B44E-2817F9E31610}" type="datetimeFigureOut">
               <a:rPr lang="en-GB" smtClean="0"/>
-              <a:t>07/07/2026</a:t>
+              <a:t>21/08/2026</a:t>
             </a:fld>
             <a:endParaRPr lang="en-GB"/>
           </a:p>
@@ -2893,7 +2895,7 @@
           <a:p>
             <a:fld id="{3E02A807-A954-F94A-B44E-2817F9E31610}" type="datetimeFigureOut">
               <a:rPr lang="en-GB" smtClean="0"/>
-              <a:t>07/07/2026</a:t>
+              <a:t>21/08/2026</a:t>
             </a:fld>
             <a:endParaRPr lang="en-GB"/>
           </a:p>
@@ -3182,7 +3184,7 @@
           <a:p>
             <a:fld id="{3E02A807-A954-F94A-B44E-2817F9E31610}" type="datetimeFigureOut">
               <a:rPr lang="en-GB" smtClean="0"/>
-              <a:t>07/07/2026</a:t>
+              <a:t>21/08/2026</a:t>
             </a:fld>
             <a:endParaRPr lang="en-GB"/>
           </a:p>
@@ -3425,7 +3427,7 @@
           <a:p>
             <a:fld id="{3E02A807-A954-F94A-B44E-2817F9E31610}" type="datetimeFigureOut">
               <a:rPr lang="en-GB" smtClean="0"/>
-              <a:t>07/07/2026</a:t>
+              <a:t>21/08/2026</a:t>
             </a:fld>
             <a:endParaRPr lang="en-GB"/>
           </a:p>
@@ -4028,24 +4030,7 @@
                 <a:ea typeface="+mn-ea"/>
                 <a:cs typeface="+mn-cs"/>
               </a:rPr>
-              <a:t>ESSEC Business School[DIPLÔME / FORMATION 1]</a:t>
-            </a:r>
-            <a:r>
-              <a:rPr kumimoji="0" lang="fr-FR" sz="900" b="1" i="0" u="none" strike="noStrike" kern="1200" cap="none" spc="0" normalizeH="0" baseline="0" noProof="0" dirty="0" err="1">
-                <a:ln>
-                  <a:noFill/>
-                </a:ln>
-                <a:solidFill>
-                  <a:srgbClr val="414141"/>
-                </a:solidFill>
-                <a:effectLst/>
-                <a:uLnTx/>
-                <a:uFillTx/>
-                <a:latin typeface="Satoshi" pitchFamily="2" charset="77"/>
-                <a:ea typeface="+mn-ea"/>
-                <a:cs typeface="+mn-cs"/>
-              </a:rPr>
-              <a:t/>
+              <a:t>[DIPLÔME / FORMATION 1]</a:t>
             </a:r>
             <a:br>
               <a:rPr kumimoji="0" lang="fr-FR" sz="900" b="0" i="0" u="none" strike="noStrike" kern="1200" cap="none" spc="0" normalizeH="0" baseline="0" noProof="0" dirty="0">
@@ -4063,23 +4048,20 @@
                 <a:cs typeface="+mn-cs"/>
               </a:rPr>
             </a:br>
-            <a:r>
-              <a:rPr kumimoji="0" lang="fr-FR" sz="900" b="0" i="0" u="none" strike="noStrike" kern="1200" cap="none" spc="0" normalizeH="0" baseline="0" noProof="0" dirty="0">
-                <a:ln>
-                  <a:noFill/>
-                </a:ln>
-                <a:solidFill>
-                  <a:srgbClr val="414141"/>
-                </a:solidFill>
-                <a:effectLst/>
-                <a:uLnTx/>
-                <a:uFillTx/>
-                <a:latin typeface="Satoshi" pitchFamily="2" charset="77"/>
-                <a:ea typeface="+mn-ea"/>
-                <a:cs typeface="+mn-cs"/>
-              </a:rPr>
-              <a:t/>
-            </a:r>
+            <a:endParaRPr kumimoji="0" lang="fr-FR" sz="900" b="0" i="0" u="none" strike="noStrike" kern="1200" cap="none" spc="0" normalizeH="0" baseline="0" noProof="0" dirty="0">
+              <a:ln>
+                <a:noFill/>
+              </a:ln>
+              <a:solidFill>
+                <a:srgbClr val="414141"/>
+              </a:solidFill>
+              <a:effectLst/>
+              <a:uLnTx/>
+              <a:uFillTx/>
+              <a:latin typeface="Satoshi" pitchFamily="2" charset="77"/>
+              <a:ea typeface="+mn-ea"/>
+              <a:cs typeface="+mn-cs"/>
+            </a:endParaRPr>
           </a:p>
           <a:p>
             <a:pPr marL="185738" marR="0" lvl="0" indent="-185738" algn="l" defTabSz="914400" rtl="0" eaLnBrk="1" fontAlgn="auto" latinLnBrk="0" hangingPunct="1">
@@ -4133,7 +4115,7 @@
                 </a:solidFill>
                 <a:latin typeface="Satoshi" pitchFamily="2" charset="77"/>
               </a:rPr>
-              <a:t>Université Paris 1 Panthéon-Sorbonne[DIPLÔME / FORMATION 2]</a:t>
+              <a:t>[DIPLÔME / FORMATION 2]</a:t>
             </a:r>
             <a:br>
               <a:rPr lang="fr-FR" sz="900" dirty="0">
@@ -4143,15 +4125,12 @@
                 <a:latin typeface="Satoshi" pitchFamily="2" charset="77"/>
               </a:rPr>
             </a:br>
-            <a:r>
-              <a:rPr lang="fr-FR" sz="900" dirty="0">
-                <a:solidFill>
-                  <a:srgbClr val="414141"/>
-                </a:solidFill>
-                <a:latin typeface="Satoshi" pitchFamily="2" charset="77"/>
-              </a:rPr>
-              <a:t/>
-            </a:r>
+            <a:endParaRPr lang="fr-FR" sz="900" dirty="0">
+              <a:solidFill>
+                <a:srgbClr val="414141"/>
+              </a:solidFill>
+              <a:latin typeface="Satoshi" pitchFamily="2" charset="77"/>
+            </a:endParaRPr>
           </a:p>
           <a:p>
             <a:pPr marL="185738" marR="0" lvl="0" indent="-185738" algn="l" defTabSz="914400" rtl="0" eaLnBrk="1" fontAlgn="auto" latinLnBrk="0" hangingPunct="1">
@@ -4674,21 +4653,6 @@
               </a:rPr>
               <a:t>#[COMPÉTENCE 2]</a:t>
             </a:r>
-            <a:r>
-              <a:rPr lang="en-GB" sz="1200" dirty="0" err="1">
-                <a:solidFill>
-                  <a:srgbClr val="414141"/>
-                </a:solidFill>
-                <a:latin typeface="Satoshi" pitchFamily="2" charset="77"/>
-              </a:rPr>
-              <a:t/>
-            </a:r>
-            <a:endParaRPr lang="en-GB" sz="1200" dirty="0">
-              <a:solidFill>
-                <a:srgbClr val="414141"/>
-              </a:solidFill>
-              <a:latin typeface="Satoshi" pitchFamily="2" charset="77"/>
-            </a:endParaRPr>
           </a:p>
         </p:txBody>
       </p:sp>
@@ -4882,60 +4846,6 @@
                 <a:latin typeface="Satoshi" pitchFamily="2" charset="77"/>
               </a:rPr>
               <a:t>[RÉSUMÉ PROFESSIONNEL — 2 à 4 lignes]</a:t>
-            </a:r>
-            <a:r>
-              <a:rPr lang="en-GB" sz="1050" dirty="0" err="1">
-                <a:solidFill>
-                  <a:schemeClr val="tx1"/>
-                </a:solidFill>
-                <a:latin typeface="Satoshi" pitchFamily="2" charset="77"/>
-              </a:rPr>
-              <a:t/>
-            </a:r>
-            <a:r>
-              <a:rPr lang="en-GB" sz="1050" dirty="0">
-                <a:solidFill>
-                  <a:schemeClr val="tx1"/>
-                </a:solidFill>
-                <a:latin typeface="Satoshi" pitchFamily="2" charset="77"/>
-              </a:rPr>
-              <a:t/>
-            </a:r>
-            <a:r>
-              <a:rPr lang="en-GB" sz="1050" dirty="0" err="1">
-                <a:solidFill>
-                  <a:schemeClr val="tx1"/>
-                </a:solidFill>
-                <a:latin typeface="Satoshi" pitchFamily="2" charset="77"/>
-              </a:rPr>
-              <a:t/>
-            </a:r>
-            <a:r>
-              <a:rPr lang="en-GB" sz="1050" dirty="0">
-                <a:solidFill>
-                  <a:schemeClr val="tx1"/>
-                </a:solidFill>
-                <a:latin typeface="Satoshi" pitchFamily="2" charset="77"/>
-              </a:rPr>
-              <a:t/>
-            </a:r>
-            <a:r>
-              <a:rPr lang="en-GB" sz="1050" dirty="0" err="1">
-                <a:solidFill>
-                  <a:schemeClr val="tx1"/>
-                </a:solidFill>
-                <a:latin typeface="Satoshi" pitchFamily="2" charset="77"/>
-              </a:rPr>
-              <a:t/>
-            </a:r>
-            <a:r>
-              <a:rPr lang="en-GB" sz="1050" dirty="0">
-                <a:solidFill>
-                  <a:schemeClr val="tx1"/>
-                </a:solidFill>
-                <a:latin typeface="Satoshi" pitchFamily="2" charset="77"/>
-              </a:rPr>
-              <a:t/>
             </a:r>
             <a:endParaRPr lang="fr-FR" sz="1050" dirty="0">
               <a:solidFill>
@@ -5575,24 +5485,6 @@
               </a:rPr>
               <a:t>[RÉALISATION 1.1]</a:t>
             </a:r>
-            <a:r>
-              <a:rPr lang="fr-FR" sz="1000" dirty="0" err="1">
-                <a:solidFill>
-                  <a:srgbClr val="414141"/>
-                </a:solidFill>
-                <a:latin typeface="Satoshi" pitchFamily="2" charset="77"/>
-              </a:rPr>
-              <a:t/>
-            </a:r>
-            <a:r>
-              <a:rPr lang="fr-FR" sz="1000" dirty="0">
-                <a:solidFill>
-                  <a:srgbClr val="414141"/>
-                </a:solidFill>
-                <a:latin typeface="Satoshi" pitchFamily="2" charset="77"/>
-              </a:rPr>
-              <a:t/>
-            </a:r>
           </a:p>
           <a:p>
             <a:pPr marL="579438" indent="-171450">
@@ -5630,24 +5522,6 @@
                 <a:latin typeface="Satoshi" pitchFamily="2" charset="77"/>
               </a:rPr>
               <a:t>[RÉALISATION 1.3]</a:t>
-            </a:r>
-            <a:r>
-              <a:rPr lang="fr-FR" sz="1000" dirty="0" err="1">
-                <a:solidFill>
-                  <a:srgbClr val="414141"/>
-                </a:solidFill>
-                <a:latin typeface="Satoshi" pitchFamily="2" charset="77"/>
-              </a:rPr>
-              <a:t/>
-            </a:r>
-            <a:r>
-              <a:rPr lang="fr-FR" sz="1000" dirty="0">
-                <a:solidFill>
-                  <a:srgbClr val="414141"/>
-                </a:solidFill>
-                <a:latin typeface="Satoshi" pitchFamily="2" charset="77"/>
-              </a:rPr>
-              <a:t/>
             </a:r>
           </a:p>
           <a:p>
@@ -5758,24 +5632,6 @@
               </a:rPr>
               <a:t>[RÉALISATION 2.2]</a:t>
             </a:r>
-            <a:r>
-              <a:rPr lang="fr-FR" sz="1000" dirty="0" err="1">
-                <a:solidFill>
-                  <a:srgbClr val="414141"/>
-                </a:solidFill>
-                <a:latin typeface="Satoshi" pitchFamily="2" charset="77"/>
-              </a:rPr>
-              <a:t/>
-            </a:r>
-            <a:r>
-              <a:rPr lang="fr-FR" sz="1000" dirty="0">
-                <a:solidFill>
-                  <a:srgbClr val="414141"/>
-                </a:solidFill>
-                <a:latin typeface="Satoshi" pitchFamily="2" charset="77"/>
-              </a:rPr>
-              <a:t/>
-            </a:r>
           </a:p>
           <a:p>
             <a:pPr marL="579438" indent="-171450">
@@ -6022,24 +5878,6 @@
               </a:rPr>
               <a:t>[RÉALISATION 4.1]</a:t>
             </a:r>
-            <a:r>
-              <a:rPr lang="fr-FR" sz="1000" dirty="0" err="1">
-                <a:solidFill>
-                  <a:srgbClr val="414141"/>
-                </a:solidFill>
-                <a:latin typeface="Satoshi" pitchFamily="2" charset="77"/>
-              </a:rPr>
-              <a:t/>
-            </a:r>
-            <a:r>
-              <a:rPr lang="fr-FR" sz="1000" dirty="0">
-                <a:solidFill>
-                  <a:srgbClr val="414141"/>
-                </a:solidFill>
-                <a:latin typeface="Satoshi" pitchFamily="2" charset="77"/>
-              </a:rPr>
-              <a:t/>
-            </a:r>
           </a:p>
           <a:p>
             <a:pPr marL="579438" indent="-171450">
@@ -6077,24 +5915,6 @@
                 <a:latin typeface="Satoshi" pitchFamily="2" charset="77"/>
               </a:rPr>
               <a:t>[RÉALISATION 4.3]</a:t>
-            </a:r>
-            <a:r>
-              <a:rPr lang="fr-FR" sz="1000" dirty="0" err="1">
-                <a:solidFill>
-                  <a:srgbClr val="414141"/>
-                </a:solidFill>
-                <a:latin typeface="Satoshi" pitchFamily="2" charset="77"/>
-              </a:rPr>
-              <a:t/>
-            </a:r>
-            <a:r>
-              <a:rPr lang="fr-FR" sz="1000" dirty="0">
-                <a:solidFill>
-                  <a:srgbClr val="414141"/>
-                </a:solidFill>
-                <a:latin typeface="Satoshi" pitchFamily="2" charset="77"/>
-              </a:rPr>
-              <a:t/>
             </a:r>
           </a:p>
         </p:txBody>
@@ -6733,17 +6553,6 @@
 </file>
 
 <file path=customXml/item1.xml><?xml version="1.0" encoding="utf-8"?>
-<p:properties xmlns:p="http://schemas.microsoft.com/office/2006/metadata/properties" xmlns:xsi="http://www.w3.org/2001/XMLSchema-instance" xmlns:pc="http://schemas.microsoft.com/office/infopath/2007/PartnerControls">
-  <documentManagement>
-    <lcf76f155ced4ddcb4097134ff3c332f xmlns="c60db47a-935d-49bf-8d3d-24164fa1b4c4">
-      <Terms xmlns="http://schemas.microsoft.com/office/infopath/2007/PartnerControls"/>
-    </lcf76f155ced4ddcb4097134ff3c332f>
-    <TaxCatchAll xmlns="cb9cc54f-e898-4014-a90b-87a614dc2c05" xsi:nil="true"/>
-  </documentManagement>
-</p:properties>
-</file>
-
-<file path=customXml/item2.xml><?xml version="1.0" encoding="utf-8"?>
 <ct:contentTypeSchema xmlns:ct="http://schemas.microsoft.com/office/2006/metadata/contentType" xmlns:ma="http://schemas.microsoft.com/office/2006/metadata/properties/metaAttributes" ct:_="" ma:_="" ma:contentTypeName="Document" ma:contentTypeID="0x010100DE7D460C113EC84AAE00DFA3490DF26A" ma:contentTypeVersion="17" ma:contentTypeDescription="Crée un document." ma:contentTypeScope="" ma:versionID="df9aab9dced122f4d0fdfd5c061969ab">
   <xsd:schema xmlns:xsd="http://www.w3.org/2001/XMLSchema" xmlns:xs="http://www.w3.org/2001/XMLSchema" xmlns:p="http://schemas.microsoft.com/office/2006/metadata/properties" xmlns:ns2="c60db47a-935d-49bf-8d3d-24164fa1b4c4" xmlns:ns3="cb9cc54f-e898-4014-a90b-87a614dc2c05" targetNamespace="http://schemas.microsoft.com/office/2006/metadata/properties" ma:root="true" ma:fieldsID="355af32aa646a47fe82d6520bcc91d29" ns2:_="" ns3:_="">
     <xsd:import namespace="c60db47a-935d-49bf-8d3d-24164fa1b4c4"/>
@@ -6992,6 +6801,17 @@
 </ct:contentTypeSchema>
 </file>
 
+<file path=customXml/item2.xml><?xml version="1.0" encoding="utf-8"?>
+<p:properties xmlns:p="http://schemas.microsoft.com/office/2006/metadata/properties" xmlns:xsi="http://www.w3.org/2001/XMLSchema-instance" xmlns:pc="http://schemas.microsoft.com/office/infopath/2007/PartnerControls">
+  <documentManagement>
+    <lcf76f155ced4ddcb4097134ff3c332f xmlns="c60db47a-935d-49bf-8d3d-24164fa1b4c4">
+      <Terms xmlns="http://schemas.microsoft.com/office/infopath/2007/PartnerControls"/>
+    </lcf76f155ced4ddcb4097134ff3c332f>
+    <TaxCatchAll xmlns="cb9cc54f-e898-4014-a90b-87a614dc2c05" xsi:nil="true"/>
+  </documentManagement>
+</p:properties>
+</file>
+
 <file path=customXml/item3.xml><?xml version="1.0" encoding="utf-8"?>
 <?mso-contentType ?>
 <FormTemplates xmlns="http://schemas.microsoft.com/sharepoint/v3/contenttype/forms">
@@ -7002,23 +6822,6 @@
 </file>
 
 <file path=customXml/itemProps1.xml><?xml version="1.0" encoding="utf-8"?>
-<ds:datastoreItem xmlns:ds="http://schemas.openxmlformats.org/officeDocument/2006/customXml" ds:itemID="{2D8B15DC-1DAD-4010-AF98-46416BFDBCC3}">
-  <ds:schemaRefs>
-    <ds:schemaRef ds:uri="http://www.w3.org/XML/1998/namespace"/>
-    <ds:schemaRef ds:uri="http://purl.org/dc/elements/1.1/"/>
-    <ds:schemaRef ds:uri="http://purl.org/dc/dcmitype/"/>
-    <ds:schemaRef ds:uri="http://schemas.openxmlformats.org/package/2006/metadata/core-properties"/>
-    <ds:schemaRef ds:uri="http://purl.org/dc/terms/"/>
-    <ds:schemaRef ds:uri="http://schemas.microsoft.com/office/2006/documentManagement/types"/>
-    <ds:schemaRef ds:uri="http://schemas.microsoft.com/office/infopath/2007/PartnerControls"/>
-    <ds:schemaRef ds:uri="cb9cc54f-e898-4014-a90b-87a614dc2c05"/>
-    <ds:schemaRef ds:uri="c60db47a-935d-49bf-8d3d-24164fa1b4c4"/>
-    <ds:schemaRef ds:uri="http://schemas.microsoft.com/office/2006/metadata/properties"/>
-  </ds:schemaRefs>
-</ds:datastoreItem>
-</file>
-
-<file path=customXml/itemProps2.xml><?xml version="1.0" encoding="utf-8"?>
 <ds:datastoreItem xmlns:ds="http://schemas.openxmlformats.org/officeDocument/2006/customXml" ds:itemID="{B6B54413-0F15-408D-A20C-12EBF31DE362}">
   <ds:schemaRefs>
     <ds:schemaRef ds:uri="http://schemas.microsoft.com/office/2006/metadata/contentType"/>
@@ -7037,6 +6840,23 @@
 </ds:datastoreItem>
 </file>
 
+<file path=customXml/itemProps2.xml><?xml version="1.0" encoding="utf-8"?>
+<ds:datastoreItem xmlns:ds="http://schemas.openxmlformats.org/officeDocument/2006/customXml" ds:itemID="{2D8B15DC-1DAD-4010-AF98-46416BFDBCC3}">
+  <ds:schemaRefs>
+    <ds:schemaRef ds:uri="http://www.w3.org/XML/1998/namespace"/>
+    <ds:schemaRef ds:uri="http://purl.org/dc/elements/1.1/"/>
+    <ds:schemaRef ds:uri="http://purl.org/dc/dcmitype/"/>
+    <ds:schemaRef ds:uri="http://schemas.openxmlformats.org/package/2006/metadata/core-properties"/>
+    <ds:schemaRef ds:uri="http://purl.org/dc/terms/"/>
+    <ds:schemaRef ds:uri="http://schemas.microsoft.com/office/2006/documentManagement/types"/>
+    <ds:schemaRef ds:uri="http://schemas.microsoft.com/office/infopath/2007/PartnerControls"/>
+    <ds:schemaRef ds:uri="cb9cc54f-e898-4014-a90b-87a614dc2c05"/>
+    <ds:schemaRef ds:uri="c60db47a-935d-49bf-8d3d-24164fa1b4c4"/>
+    <ds:schemaRef ds:uri="http://schemas.microsoft.com/office/2006/metadata/properties"/>
+  </ds:schemaRefs>
+</ds:datastoreItem>
+</file>
+
 <file path=customXml/itemProps3.xml><?xml version="1.0" encoding="utf-8"?>
 <ds:datastoreItem xmlns:ds="http://schemas.openxmlformats.org/officeDocument/2006/customXml" ds:itemID="{611C823C-3BAD-42C9-8371-A939C5D92248}">
   <ds:schemaRefs>
